--- a/docs/Airline_Reliability_PB.pptx
+++ b/docs/Airline_Reliability_PB.pptx
@@ -460,7 +460,7 @@
           <a:p>
             <a:fld id="{3CF752A9-003E-4083-9847-72AB3F27C035}" type="datetimeFigureOut">
               <a:rPr lang="de-DE" smtClean="0"/>
-              <a:t>03.09.2026</a:t>
+              <a:t>24.09.2026</a:t>
             </a:fld>
             <a:endParaRPr lang="de-DE"/>
           </a:p>
@@ -638,7 +638,7 @@
           <a:p>
             <a:fld id="{613AC1BD-E3F7-4C50-97FB-293B748B6C7F}" type="datetimeFigureOut">
               <a:rPr lang="de-DE" smtClean="0"/>
-              <a:t>03.09.2026</a:t>
+              <a:t>24.09.2026</a:t>
             </a:fld>
             <a:endParaRPr lang="de-DE"/>
           </a:p>
@@ -2859,36 +2859,6 @@
           </a:ln>
         </p:spPr>
       </p:pic>
-      <p:pic>
-        <p:nvPicPr>
-          <p:cNvPr id="15" name="Grafik 14">
-            <a:extLst>
-              <a:ext uri="{FF2B5EF4-FFF2-40B4-BE49-F238E27FC236}">
-                <a16:creationId xmlns:a16="http://schemas.microsoft.com/office/drawing/2014/main" id="{62D02214-C38A-76CA-402F-451B70D92223}"/>
-              </a:ext>
-            </a:extLst>
-          </p:cNvPr>
-          <p:cNvPicPr>
-            <a:picLocks noChangeAspect="1"/>
-          </p:cNvPicPr>
-          <p:nvPr/>
-        </p:nvPicPr>
-        <p:blipFill>
-          <a:blip r:embed="rId3"/>
-          <a:stretch>
-            <a:fillRect/>
-          </a:stretch>
-        </p:blipFill>
-        <p:spPr>
-          <a:xfrm>
-            <a:off x="10652396" y="2923343"/>
-            <a:ext cx="1128920" cy="1128920"/>
-          </a:xfrm>
-          <a:prstGeom prst="rect">
-            <a:avLst/>
-          </a:prstGeom>
-        </p:spPr>
-      </p:pic>
       <p:sp>
         <p:nvSpPr>
           <p:cNvPr id="5" name="Rechteck 4">
@@ -2959,6 +2929,36 @@
           </a:p>
         </p:txBody>
       </p:sp>
+      <p:pic>
+        <p:nvPicPr>
+          <p:cNvPr id="6" name="Grafik 5">
+            <a:extLst>
+              <a:ext uri="{FF2B5EF4-FFF2-40B4-BE49-F238E27FC236}">
+                <a16:creationId xmlns:a16="http://schemas.microsoft.com/office/drawing/2014/main" id="{4993C388-297A-8831-B176-AF8CE66ECD77}"/>
+              </a:ext>
+            </a:extLst>
+          </p:cNvPr>
+          <p:cNvPicPr>
+            <a:picLocks noChangeAspect="1"/>
+          </p:cNvPicPr>
+          <p:nvPr/>
+        </p:nvPicPr>
+        <p:blipFill>
+          <a:blip r:embed="rId3"/>
+          <a:stretch>
+            <a:fillRect/>
+          </a:stretch>
+        </p:blipFill>
+        <p:spPr>
+          <a:xfrm>
+            <a:off x="10652395" y="2876726"/>
+            <a:ext cx="1175538" cy="1175538"/>
+          </a:xfrm>
+          <a:prstGeom prst="rect">
+            <a:avLst/>
+          </a:prstGeom>
+        </p:spPr>
+      </p:pic>
     </p:spTree>
   </p:cSld>
   <p:clrMapOvr>
@@ -16640,17 +16640,6 @@
 </file>
 
 <file path=customXml/item1.xml><?xml version="1.0" encoding="utf-8"?>
-<p:properties xmlns:p="http://schemas.microsoft.com/office/2006/metadata/properties" xmlns:xsi="http://www.w3.org/2001/XMLSchema-instance" xmlns:pc="http://schemas.microsoft.com/office/infopath/2007/PartnerControls">
-  <documentManagement>
-    <lcf76f155ced4ddcb4097134ff3c332f xmlns="9aa5a65c-f4ce-4ee4-acf7-5e3b2ace5bfd">
-      <Terms xmlns="http://schemas.microsoft.com/office/infopath/2007/PartnerControls"/>
-    </lcf76f155ced4ddcb4097134ff3c332f>
-    <TaxCatchAll xmlns="66bb7404-1a7c-4cd5-b899-503b4f4a7830" xsi:nil="true"/>
-  </documentManagement>
-</p:properties>
-</file>
-
-<file path=customXml/item2.xml><?xml version="1.0" encoding="utf-8"?>
 <ct:contentTypeSchema xmlns:ct="http://schemas.microsoft.com/office/2006/metadata/contentType" xmlns:ma="http://schemas.microsoft.com/office/2006/metadata/properties/metaAttributes" ct:_="" ma:_="" ma:contentTypeName="Document" ma:contentTypeID="0x0101006CD9D0312D38F94DA02BEC0C7012E0F5" ma:contentTypeVersion="11" ma:contentTypeDescription="Create a new document." ma:contentTypeScope="" ma:versionID="9a73361d995b0bed58ef5b3962fcd148">
   <xsd:schema xmlns:xsd="http://www.w3.org/2001/XMLSchema" xmlns:xs="http://www.w3.org/2001/XMLSchema" xmlns:p="http://schemas.microsoft.com/office/2006/metadata/properties" xmlns:ns2="9aa5a65c-f4ce-4ee4-acf7-5e3b2ace5bfd" xmlns:ns3="66bb7404-1a7c-4cd5-b899-503b4f4a7830" targetNamespace="http://schemas.microsoft.com/office/2006/metadata/properties" ma:root="true" ma:fieldsID="a85bbe206d45265116e8c51ee0380a62" ns2:_="" ns3:_="">
     <xsd:import namespace="9aa5a65c-f4ce-4ee4-acf7-5e3b2ace5bfd"/>
@@ -16845,6 +16834,17 @@
 </ct:contentTypeSchema>
 </file>
 
+<file path=customXml/item2.xml><?xml version="1.0" encoding="utf-8"?>
+<p:properties xmlns:p="http://schemas.microsoft.com/office/2006/metadata/properties" xmlns:xsi="http://www.w3.org/2001/XMLSchema-instance" xmlns:pc="http://schemas.microsoft.com/office/infopath/2007/PartnerControls">
+  <documentManagement>
+    <lcf76f155ced4ddcb4097134ff3c332f xmlns="9aa5a65c-f4ce-4ee4-acf7-5e3b2ace5bfd">
+      <Terms xmlns="http://schemas.microsoft.com/office/infopath/2007/PartnerControls"/>
+    </lcf76f155ced4ddcb4097134ff3c332f>
+    <TaxCatchAll xmlns="66bb7404-1a7c-4cd5-b899-503b4f4a7830" xsi:nil="true"/>
+  </documentManagement>
+</p:properties>
+</file>
+
 <file path=customXml/item3.xml><?xml version="1.0" encoding="utf-8"?>
 <?mso-contentType ?>
 <FormTemplates xmlns="http://schemas.microsoft.com/sharepoint/v3/contenttype/forms">
@@ -16855,17 +16855,6 @@
 </file>
 
 <file path=customXml/itemProps1.xml><?xml version="1.0" encoding="utf-8"?>
-<ds:datastoreItem xmlns:ds="http://schemas.openxmlformats.org/officeDocument/2006/customXml" ds:itemID="{80B8EBE4-FC2B-439D-83E4-1FC00013EB90}">
-  <ds:schemaRefs>
-    <ds:schemaRef ds:uri="http://schemas.microsoft.com/office/2006/metadata/properties"/>
-    <ds:schemaRef ds:uri="http://schemas.microsoft.com/office/infopath/2007/PartnerControls"/>
-    <ds:schemaRef ds:uri="9aa5a65c-f4ce-4ee4-acf7-5e3b2ace5bfd"/>
-    <ds:schemaRef ds:uri="66bb7404-1a7c-4cd5-b899-503b4f4a7830"/>
-  </ds:schemaRefs>
-</ds:datastoreItem>
-</file>
-
-<file path=customXml/itemProps2.xml><?xml version="1.0" encoding="utf-8"?>
 <ds:datastoreItem xmlns:ds="http://schemas.openxmlformats.org/officeDocument/2006/customXml" ds:itemID="{D9BC1E96-25F1-44B9-8174-507263BA1D6E}">
   <ds:schemaRefs>
     <ds:schemaRef ds:uri="http://schemas.microsoft.com/office/2006/metadata/contentType"/>
@@ -16884,6 +16873,17 @@
 </ds:datastoreItem>
 </file>
 
+<file path=customXml/itemProps2.xml><?xml version="1.0" encoding="utf-8"?>
+<ds:datastoreItem xmlns:ds="http://schemas.openxmlformats.org/officeDocument/2006/customXml" ds:itemID="{80B8EBE4-FC2B-439D-83E4-1FC00013EB90}">
+  <ds:schemaRefs>
+    <ds:schemaRef ds:uri="http://schemas.microsoft.com/office/2006/metadata/properties"/>
+    <ds:schemaRef ds:uri="http://schemas.microsoft.com/office/infopath/2007/PartnerControls"/>
+    <ds:schemaRef ds:uri="9aa5a65c-f4ce-4ee4-acf7-5e3b2ace5bfd"/>
+    <ds:schemaRef ds:uri="66bb7404-1a7c-4cd5-b899-503b4f4a7830"/>
+  </ds:schemaRefs>
+</ds:datastoreItem>
+</file>
+
 <file path=customXml/itemProps3.xml><?xml version="1.0" encoding="utf-8"?>
 <ds:datastoreItem xmlns:ds="http://schemas.openxmlformats.org/officeDocument/2006/customXml" ds:itemID="{50732050-07CB-4EA1-8B62-F2C4125C0DDD}">
   <ds:schemaRefs>
